--- a/public/fun/pack/pptx/weddingpro/결혼식프리미엄_20_감사·답례중심_피스타치오크림.pptx
+++ b/public/fun/pack/pptx/weddingpro/결혼식프리미엄_20_감사·답례중심_피스타치오크림.pptx
@@ -113,12 +113,12 @@
   <p:extLst>
     <p:ext uri="{521415D9-36F7-43E2-AB2F-B90AF26B5E84}">
       <p14:sectionLst xmlns:p14="http://schemas.microsoft.com/office/powerpoint/2010/main">
-        <p14:section name="시작" id="{DE7E60C8-962A-4D3C-BAE6-B7AA1E209336}">
+        <p14:section name="시작" id="{872A1501-EB0F-4A2F-9F00-636A8FE3A914}">
           <p14:sldIdLst>
             <p14:sldId id="256"/>
           </p14:sldIdLst>
         </p14:section>
-        <p14:section name="본문" id="{4516539B-85F5-4E62-96BF-871B755AABA4}">
+        <p14:section name="본문" id="{44C022E6-6499-4093-9590-F4116FAEBE52}">
           <p14:sldIdLst>
             <p14:sldId id="257"/>
             <p14:sldId id="258"/>
@@ -127,7 +127,7 @@
             <p14:sldId id="261"/>
           </p14:sldIdLst>
         </p14:section>
-        <p14:section name="마무리" id="{FFD1C44E-956D-4A29-827D-DC8CB4D3AFBC}">
+        <p14:section name="마무리" id="{D786C41E-2F8C-4106-9B5A-D87569054BAC}">
           <p14:sldIdLst>
             <p14:sldId id="262"/>
           </p14:sldIdLst>
@@ -1548,7 +1548,7 @@
             </a:lvl1pPr>
           </a:lstStyle>
           <a:p>
-            <a:fld id="{FD353159-8B5E-4FD8-BD83-AA1059C7E9FB}" type="slidenum">
+            <a:fld id="{F112539A-16E2-44D2-85A3-AC85C412C4A0}" type="slidenum">
               <a:rPr lang="en-US"/>
               <a:t>‹#›</a:t>
             </a:fld>
@@ -2328,7 +2328,7 @@
             </a:lvl1pPr>
           </a:lstStyle>
           <a:p>
-            <a:fld id="{AE8DEA5E-1844-4E50-BD13-9DBC6DE12CAC}" type="slidenum">
+            <a:fld id="{E692FB86-D4A3-4527-93CA-6D107B4C597A}" type="slidenum">
               <a:rPr lang="en-US"/>
               <a:t>‹#›</a:t>
             </a:fld>
@@ -3081,7 +3081,7 @@
             </a:lvl1pPr>
           </a:lstStyle>
           <a:p>
-            <a:fld id="{F3EE784B-B88D-4F1B-AD89-D6BCB22352B4}" type="slidenum">
+            <a:fld id="{FFC4B11B-2633-4444-8D26-CBB255B5EC79}" type="slidenum">
               <a:rPr lang="en-US"/>
               <a:t>‹#›</a:t>
             </a:fld>
@@ -4057,7 +4057,7 @@
           <a:p>
             <a:r>
               <a:rPr lang="ko-KR"/>
-              <a:t>0000. 00. 00 · 예식장 이름</a:t>
+              <a:t>날짜 입력 · 예식장 이름</a:t>
             </a:r>
           </a:p>
         </p:txBody>
@@ -4292,7 +4292,7 @@
           <a:bodyPr/>
           <a:lstStyle/>
           <a:p>
-            <a:fld id="{5A9FDDF1-5ED1-4F5F-810B-9DF6EC187F4B}" type="slidenum">
+            <a:fld id="{6804FC6D-A55B-4EDC-941B-BF555CEFBC72}" type="slidenum">
               <a:rPr lang="en-US"/>
               <a:t>‹#›</a:t>
             </a:fld>
@@ -4736,7 +4736,7 @@
           <a:bodyPr/>
           <a:lstStyle/>
           <a:p>
-            <a:fld id="{7111EDB1-40F4-47C9-A862-C292B1B65AB0}" type="slidenum">
+            <a:fld id="{DB942D33-E889-41F6-8973-1F04D8F78549}" type="slidenum">
               <a:rPr lang="en-US"/>
               <a:t>‹#›</a:t>
             </a:fld>
@@ -5099,7 +5099,7 @@
           <a:bodyPr/>
           <a:lstStyle/>
           <a:p>
-            <a:fld id="{CFE7991D-80AD-46C5-B0D0-CF670B1B60A2}" type="slidenum">
+            <a:fld id="{EEDDED14-8C1F-471F-837D-EA92A6DD4FB6}" type="slidenum">
               <a:rPr lang="en-US"/>
               <a:t>‹#›</a:t>
             </a:fld>
@@ -6459,7 +6459,7 @@
           <a:bodyPr/>
           <a:lstStyle/>
           <a:p>
-            <a:fld id="{86F36D0A-D573-47B6-9342-56950B00CF6F}" type="slidenum">
+            <a:fld id="{4F694D7F-34CF-4444-8BB9-B39B8FA20664}" type="slidenum">
               <a:rPr lang="en-US"/>
               <a:t>‹#›</a:t>
             </a:fld>
@@ -6547,7 +6547,7 @@
           <a:bodyPr/>
           <a:lstStyle/>
           <a:p>
-            <a:fld id="{F928B50D-376A-4A01-9EAC-5B2018E985E8}" type="slidenum">
+            <a:fld id="{0EA847CA-3DF5-4F12-886C-4210FFF1CD91}" type="slidenum">
               <a:rPr lang="en-US"/>
               <a:t>‹#›</a:t>
             </a:fld>
